--- a/doc/OilMixProp 1.0 Introduction - 20250311.pptx
+++ b/doc/OilMixProp 1.0 Introduction - 20250311.pptx
@@ -277,7 +277,7 @@
           <a:p>
             <a:fld id="{283A9E21-4981-413F-9BAB-A1BE42E0A624}" type="datetimeFigureOut">
               <a:rPr lang="de-DE" smtClean="0"/>
-              <a:t>11.04.2025</a:t>
+              <a:t>16.02.2026</a:t>
             </a:fld>
             <a:endParaRPr lang="de-DE"/>
           </a:p>
@@ -9579,9 +9579,9 @@
         <p:grpSpPr>
           <a:xfrm>
             <a:off x="1552866" y="1161503"/>
-            <a:ext cx="8708899" cy="3704150"/>
+            <a:ext cx="8799688" cy="3704150"/>
             <a:chOff x="329184" y="1921261"/>
-            <a:chExt cx="8708899" cy="3704150"/>
+            <a:chExt cx="8799688" cy="3704150"/>
           </a:xfrm>
         </p:grpSpPr>
         <p:sp>
@@ -9677,7 +9677,7 @@
           <p:spPr>
             <a:xfrm>
               <a:off x="329184" y="1921261"/>
-              <a:ext cx="8646728" cy="300082"/>
+              <a:ext cx="8799688" cy="300082"/>
             </a:xfrm>
             <a:prstGeom prst="rect">
               <a:avLst/>
